--- a/AirBnb SQL Project.pptx
+++ b/AirBnb SQL Project.pptx
@@ -115,13 +115,18 @@
       </a:defRPr>
     </a:lvl9pPr>
   </p:defaultTextStyle>
+  <p:extLst>
+    <p:ext uri="{EFAFB233-063F-42B5-8137-9DF3F51BA10A}">
+      <p15:sldGuideLst xmlns:p15="http://schemas.microsoft.com/office/powerpoint/2012/main"/>
+    </p:ext>
+  </p:extLst>
 </p:presentation>
 </file>
 
 <file path=ppt/revisionInfo.xml><?xml version="1.0" encoding="utf-8"?>
 <p1510:revInfo xmlns:a="http://schemas.openxmlformats.org/drawingml/2006/main" xmlns:r="http://schemas.openxmlformats.org/officeDocument/2006/relationships" xmlns:p1510="http://schemas.microsoft.com/office/powerpoint/2015/10/main">
   <p1510:revLst>
-    <p1510:client id="{DD6EC93B-FA66-8943-9BB1-D9397972BC82}" v="8" dt="2025-02-10T12:47:58.103"/>
+    <p1510:client id="{DD6EC93B-FA66-8943-9BB1-D9397972BC82}" v="12" dt="2025-02-19T09:55:33.979"/>
   </p1510:revLst>
 </p1510:revInfo>
 </file>
@@ -131,24 +136,47 @@
   <pc:docChgLst>
     <pc:chgData name="Ebenezer Ekaka-a" userId="fd0a449858f27441" providerId="LiveId" clId="{DD6EC93B-FA66-8943-9BB1-D9397972BC82}"/>
     <pc:docChg chg="custSel addSld modSld sldOrd">
-      <pc:chgData name="Ebenezer Ekaka-a" userId="fd0a449858f27441" providerId="LiveId" clId="{DD6EC93B-FA66-8943-9BB1-D9397972BC82}" dt="2025-02-10T12:48:51.956" v="339" actId="1076"/>
+      <pc:chgData name="Ebenezer Ekaka-a" userId="fd0a449858f27441" providerId="LiveId" clId="{DD6EC93B-FA66-8943-9BB1-D9397972BC82}" dt="2025-02-19T09:55:40.721" v="457" actId="1076"/>
       <pc:docMkLst>
         <pc:docMk/>
       </pc:docMkLst>
       <pc:sldChg chg="modSp mod">
-        <pc:chgData name="Ebenezer Ekaka-a" userId="fd0a449858f27441" providerId="LiveId" clId="{DD6EC93B-FA66-8943-9BB1-D9397972BC82}" dt="2025-02-10T12:45:59.511" v="319" actId="20577"/>
+        <pc:chgData name="Ebenezer Ekaka-a" userId="fd0a449858f27441" providerId="LiveId" clId="{DD6EC93B-FA66-8943-9BB1-D9397972BC82}" dt="2025-02-19T09:28:07.396" v="431" actId="20577"/>
         <pc:sldMkLst>
           <pc:docMk/>
           <pc:sldMk cId="2626588831" sldId="257"/>
         </pc:sldMkLst>
         <pc:spChg chg="mod">
-          <ac:chgData name="Ebenezer Ekaka-a" userId="fd0a449858f27441" providerId="LiveId" clId="{DD6EC93B-FA66-8943-9BB1-D9397972BC82}" dt="2025-02-10T12:45:59.511" v="319" actId="20577"/>
+          <ac:chgData name="Ebenezer Ekaka-a" userId="fd0a449858f27441" providerId="LiveId" clId="{DD6EC93B-FA66-8943-9BB1-D9397972BC82}" dt="2025-02-19T09:28:07.396" v="431" actId="20577"/>
           <ac:spMkLst>
             <pc:docMk/>
             <pc:sldMk cId="2626588831" sldId="257"/>
             <ac:spMk id="3" creationId="{0818E1B0-6FBC-3CEE-9743-DF66FCACE753}"/>
           </ac:spMkLst>
         </pc:spChg>
+      </pc:sldChg>
+      <pc:sldChg chg="addSp delSp modSp mod">
+        <pc:chgData name="Ebenezer Ekaka-a" userId="fd0a449858f27441" providerId="LiveId" clId="{DD6EC93B-FA66-8943-9BB1-D9397972BC82}" dt="2025-02-19T09:30:22.828" v="438" actId="1076"/>
+        <pc:sldMkLst>
+          <pc:docMk/>
+          <pc:sldMk cId="1240668411" sldId="260"/>
+        </pc:sldMkLst>
+        <pc:picChg chg="add mod">
+          <ac:chgData name="Ebenezer Ekaka-a" userId="fd0a449858f27441" providerId="LiveId" clId="{DD6EC93B-FA66-8943-9BB1-D9397972BC82}" dt="2025-02-19T09:30:22.828" v="438" actId="1076"/>
+          <ac:picMkLst>
+            <pc:docMk/>
+            <pc:sldMk cId="1240668411" sldId="260"/>
+            <ac:picMk id="4" creationId="{CF3E37EB-26CE-E9B0-330C-3FD4B785A045}"/>
+          </ac:picMkLst>
+        </pc:picChg>
+        <pc:picChg chg="del mod">
+          <ac:chgData name="Ebenezer Ekaka-a" userId="fd0a449858f27441" providerId="LiveId" clId="{DD6EC93B-FA66-8943-9BB1-D9397972BC82}" dt="2025-02-19T09:30:04.860" v="435" actId="478"/>
+          <ac:picMkLst>
+            <pc:docMk/>
+            <pc:sldMk cId="1240668411" sldId="260"/>
+            <ac:picMk id="9" creationId="{8EB26CA8-ED3E-2950-B606-D673EECCFF6C}"/>
+          </ac:picMkLst>
+        </pc:picChg>
       </pc:sldChg>
       <pc:sldChg chg="ord">
         <pc:chgData name="Ebenezer Ekaka-a" userId="fd0a449858f27441" providerId="LiveId" clId="{DD6EC93B-FA66-8943-9BB1-D9397972BC82}" dt="2025-02-10T11:01:55.022" v="51" actId="20578"/>
@@ -228,7 +256,7 @@
         </pc:picChg>
       </pc:sldChg>
       <pc:sldChg chg="addSp delSp modSp add mod ord">
-        <pc:chgData name="Ebenezer Ekaka-a" userId="fd0a449858f27441" providerId="LiveId" clId="{DD6EC93B-FA66-8943-9BB1-D9397972BC82}" dt="2025-02-10T11:29:30.907" v="119" actId="1076"/>
+        <pc:chgData name="Ebenezer Ekaka-a" userId="fd0a449858f27441" providerId="LiveId" clId="{DD6EC93B-FA66-8943-9BB1-D9397972BC82}" dt="2025-02-19T09:55:21.466" v="451" actId="14100"/>
         <pc:sldMkLst>
           <pc:docMk/>
           <pc:sldMk cId="1080346520" sldId="264"/>
@@ -241,6 +269,14 @@
             <ac:spMk id="2" creationId="{E260A45C-7132-7110-2A2C-C53F12493D87}"/>
           </ac:spMkLst>
         </pc:spChg>
+        <pc:picChg chg="add del mod">
+          <ac:chgData name="Ebenezer Ekaka-a" userId="fd0a449858f27441" providerId="LiveId" clId="{DD6EC93B-FA66-8943-9BB1-D9397972BC82}" dt="2025-02-19T09:54:55.736" v="446" actId="478"/>
+          <ac:picMkLst>
+            <pc:docMk/>
+            <pc:sldMk cId="1080346520" sldId="264"/>
+            <ac:picMk id="4" creationId="{5D53469F-8173-98A0-1FAC-F3FA09344994}"/>
+          </ac:picMkLst>
+        </pc:picChg>
         <pc:picChg chg="del">
           <ac:chgData name="Ebenezer Ekaka-a" userId="fd0a449858f27441" providerId="LiveId" clId="{DD6EC93B-FA66-8943-9BB1-D9397972BC82}" dt="2025-02-10T11:23:46.277" v="86" actId="478"/>
           <ac:picMkLst>
@@ -257,6 +293,14 @@
             <ac:picMk id="5" creationId="{96E4D7E5-7F2C-AD21-0287-218C77AACC9C}"/>
           </ac:picMkLst>
         </pc:picChg>
+        <pc:picChg chg="add mod">
+          <ac:chgData name="Ebenezer Ekaka-a" userId="fd0a449858f27441" providerId="LiveId" clId="{DD6EC93B-FA66-8943-9BB1-D9397972BC82}" dt="2025-02-19T09:55:21.466" v="451" actId="14100"/>
+          <ac:picMkLst>
+            <pc:docMk/>
+            <pc:sldMk cId="1080346520" sldId="264"/>
+            <ac:picMk id="6" creationId="{92292B79-1010-689D-CC54-F34CA6E5CFC8}"/>
+          </ac:picMkLst>
+        </pc:picChg>
         <pc:picChg chg="add del mod">
           <ac:chgData name="Ebenezer Ekaka-a" userId="fd0a449858f27441" providerId="LiveId" clId="{DD6EC93B-FA66-8943-9BB1-D9397972BC82}" dt="2025-02-10T11:24:29.466" v="96" actId="21"/>
           <ac:picMkLst>
@@ -265,8 +309,8 @@
             <ac:picMk id="7" creationId="{0B8B7041-1E10-451D-1BD6-CA1C0984ADE4}"/>
           </ac:picMkLst>
         </pc:picChg>
-        <pc:picChg chg="add mod">
-          <ac:chgData name="Ebenezer Ekaka-a" userId="fd0a449858f27441" providerId="LiveId" clId="{DD6EC93B-FA66-8943-9BB1-D9397972BC82}" dt="2025-02-10T11:29:30.907" v="119" actId="1076"/>
+        <pc:picChg chg="add del mod">
+          <ac:chgData name="Ebenezer Ekaka-a" userId="fd0a449858f27441" providerId="LiveId" clId="{DD6EC93B-FA66-8943-9BB1-D9397972BC82}" dt="2025-02-19T09:30:35.144" v="439" actId="478"/>
           <ac:picMkLst>
             <pc:docMk/>
             <pc:sldMk cId="1080346520" sldId="264"/>
@@ -283,7 +327,7 @@
         </pc:picChg>
       </pc:sldChg>
       <pc:sldChg chg="addSp delSp modSp add mod">
-        <pc:chgData name="Ebenezer Ekaka-a" userId="fd0a449858f27441" providerId="LiveId" clId="{DD6EC93B-FA66-8943-9BB1-D9397972BC82}" dt="2025-02-10T11:29:52.394" v="121" actId="1076"/>
+        <pc:chgData name="Ebenezer Ekaka-a" userId="fd0a449858f27441" providerId="LiveId" clId="{DD6EC93B-FA66-8943-9BB1-D9397972BC82}" dt="2025-02-19T09:55:40.721" v="457" actId="1076"/>
         <pc:sldMkLst>
           <pc:docMk/>
           <pc:sldMk cId="4219847952" sldId="265"/>
@@ -313,7 +357,15 @@
           </ac:picMkLst>
         </pc:picChg>
         <pc:picChg chg="add mod">
-          <ac:chgData name="Ebenezer Ekaka-a" userId="fd0a449858f27441" providerId="LiveId" clId="{DD6EC93B-FA66-8943-9BB1-D9397972BC82}" dt="2025-02-10T11:29:52.394" v="121" actId="1076"/>
+          <ac:chgData name="Ebenezer Ekaka-a" userId="fd0a449858f27441" providerId="LiveId" clId="{DD6EC93B-FA66-8943-9BB1-D9397972BC82}" dt="2025-02-19T09:55:40.721" v="457" actId="1076"/>
+          <ac:picMkLst>
+            <pc:docMk/>
+            <pc:sldMk cId="4219847952" sldId="265"/>
+            <ac:picMk id="4" creationId="{5FB7F884-8526-B222-0BB9-29010C0B7EF4}"/>
+          </ac:picMkLst>
+        </pc:picChg>
+        <pc:picChg chg="add del mod">
+          <ac:chgData name="Ebenezer Ekaka-a" userId="fd0a449858f27441" providerId="LiveId" clId="{DD6EC93B-FA66-8943-9BB1-D9397972BC82}" dt="2025-02-19T09:55:25.873" v="452" actId="478"/>
           <ac:picMkLst>
             <pc:docMk/>
             <pc:sldMk cId="4219847952" sldId="265"/>
@@ -545,7 +597,7 @@
           <a:p>
             <a:fld id="{CB154265-A0FC-234F-A725-3A4E497C209A}" type="datetimeFigureOut">
               <a:rPr lang="en-US" smtClean="0"/>
-              <a:t>2/10/25</a:t>
+              <a:t>2/19/25</a:t>
             </a:fld>
             <a:endParaRPr lang="en-US"/>
           </a:p>
@@ -745,7 +797,7 @@
           <a:p>
             <a:fld id="{CB154265-A0FC-234F-A725-3A4E497C209A}" type="datetimeFigureOut">
               <a:rPr lang="en-US" smtClean="0"/>
-              <a:t>2/10/25</a:t>
+              <a:t>2/19/25</a:t>
             </a:fld>
             <a:endParaRPr lang="en-US"/>
           </a:p>
@@ -955,7 +1007,7 @@
           <a:p>
             <a:fld id="{CB154265-A0FC-234F-A725-3A4E497C209A}" type="datetimeFigureOut">
               <a:rPr lang="en-US" smtClean="0"/>
-              <a:t>2/10/25</a:t>
+              <a:t>2/19/25</a:t>
             </a:fld>
             <a:endParaRPr lang="en-US"/>
           </a:p>
@@ -1155,7 +1207,7 @@
           <a:p>
             <a:fld id="{CB154265-A0FC-234F-A725-3A4E497C209A}" type="datetimeFigureOut">
               <a:rPr lang="en-US" smtClean="0"/>
-              <a:t>2/10/25</a:t>
+              <a:t>2/19/25</a:t>
             </a:fld>
             <a:endParaRPr lang="en-US"/>
           </a:p>
@@ -1431,7 +1483,7 @@
           <a:p>
             <a:fld id="{CB154265-A0FC-234F-A725-3A4E497C209A}" type="datetimeFigureOut">
               <a:rPr lang="en-US" smtClean="0"/>
-              <a:t>2/10/25</a:t>
+              <a:t>2/19/25</a:t>
             </a:fld>
             <a:endParaRPr lang="en-US"/>
           </a:p>
@@ -1699,7 +1751,7 @@
           <a:p>
             <a:fld id="{CB154265-A0FC-234F-A725-3A4E497C209A}" type="datetimeFigureOut">
               <a:rPr lang="en-US" smtClean="0"/>
-              <a:t>2/10/25</a:t>
+              <a:t>2/19/25</a:t>
             </a:fld>
             <a:endParaRPr lang="en-US"/>
           </a:p>
@@ -2114,7 +2166,7 @@
           <a:p>
             <a:fld id="{CB154265-A0FC-234F-A725-3A4E497C209A}" type="datetimeFigureOut">
               <a:rPr lang="en-US" smtClean="0"/>
-              <a:t>2/10/25</a:t>
+              <a:t>2/19/25</a:t>
             </a:fld>
             <a:endParaRPr lang="en-US"/>
           </a:p>
@@ -2256,7 +2308,7 @@
           <a:p>
             <a:fld id="{CB154265-A0FC-234F-A725-3A4E497C209A}" type="datetimeFigureOut">
               <a:rPr lang="en-US" smtClean="0"/>
-              <a:t>2/10/25</a:t>
+              <a:t>2/19/25</a:t>
             </a:fld>
             <a:endParaRPr lang="en-US"/>
           </a:p>
@@ -2369,7 +2421,7 @@
           <a:p>
             <a:fld id="{CB154265-A0FC-234F-A725-3A4E497C209A}" type="datetimeFigureOut">
               <a:rPr lang="en-US" smtClean="0"/>
-              <a:t>2/10/25</a:t>
+              <a:t>2/19/25</a:t>
             </a:fld>
             <a:endParaRPr lang="en-US"/>
           </a:p>
@@ -2682,7 +2734,7 @@
           <a:p>
             <a:fld id="{CB154265-A0FC-234F-A725-3A4E497C209A}" type="datetimeFigureOut">
               <a:rPr lang="en-US" smtClean="0"/>
-              <a:t>2/10/25</a:t>
+              <a:t>2/19/25</a:t>
             </a:fld>
             <a:endParaRPr lang="en-US"/>
           </a:p>
@@ -2971,7 +3023,7 @@
           <a:p>
             <a:fld id="{CB154265-A0FC-234F-A725-3A4E497C209A}" type="datetimeFigureOut">
               <a:rPr lang="en-US" smtClean="0"/>
-              <a:t>2/10/25</a:t>
+              <a:t>2/19/25</a:t>
             </a:fld>
             <a:endParaRPr lang="en-US"/>
           </a:p>
@@ -3214,7 +3266,7 @@
           <a:p>
             <a:fld id="{CB154265-A0FC-234F-A725-3A4E497C209A}" type="datetimeFigureOut">
               <a:rPr lang="en-US" smtClean="0"/>
-              <a:t>2/10/25</a:t>
+              <a:t>2/19/25</a:t>
             </a:fld>
             <a:endParaRPr lang="en-US"/>
           </a:p>
@@ -4642,10 +4694,10 @@
       </p:sp>
       <p:pic>
         <p:nvPicPr>
-          <p:cNvPr id="9" name="Picture 8" descr="A screen shot of a computer code&#10;&#10;Description automatically generated">
-            <a:extLst>
-              <a:ext uri="{FF2B5EF4-FFF2-40B4-BE49-F238E27FC236}">
-                <a16:creationId xmlns:a16="http://schemas.microsoft.com/office/drawing/2014/main" id="{8A10915E-6856-98EA-A7C2-940D671525E7}"/>
+          <p:cNvPr id="6" name="Picture 5" descr="A screen shot of a computer code&#10;&#10;Description automatically generated">
+            <a:extLst>
+              <a:ext uri="{FF2B5EF4-FFF2-40B4-BE49-F238E27FC236}">
+                <a16:creationId xmlns:a16="http://schemas.microsoft.com/office/drawing/2014/main" id="{92292B79-1010-689D-CC54-F34CA6E5CFC8}"/>
               </a:ext>
             </a:extLst>
           </p:cNvPr>
@@ -4662,8 +4714,8 @@
         </p:blipFill>
         <p:spPr>
           <a:xfrm>
-            <a:off x="1385454" y="2167758"/>
-            <a:ext cx="9421092" cy="2522483"/>
+            <a:off x="699714" y="1777999"/>
+            <a:ext cx="10693548" cy="2825531"/>
           </a:xfrm>
           <a:prstGeom prst="rect">
             <a:avLst/>
@@ -5133,10 +5185,10 @@
       </p:sp>
       <p:pic>
         <p:nvPicPr>
-          <p:cNvPr id="5" name="Picture 4" descr="A screenshot of a computer&#10;&#10;Description automatically generated">
-            <a:extLst>
-              <a:ext uri="{FF2B5EF4-FFF2-40B4-BE49-F238E27FC236}">
-                <a16:creationId xmlns:a16="http://schemas.microsoft.com/office/drawing/2014/main" id="{53F68585-2069-E653-D64E-40DD3E8AC5AE}"/>
+          <p:cNvPr id="4" name="Picture 3" descr="A screenshot of a computer&#10;&#10;Description automatically generated">
+            <a:extLst>
+              <a:ext uri="{FF2B5EF4-FFF2-40B4-BE49-F238E27FC236}">
+                <a16:creationId xmlns:a16="http://schemas.microsoft.com/office/drawing/2014/main" id="{5FB7F884-8526-B222-0BB9-29010C0B7EF4}"/>
               </a:ext>
             </a:extLst>
           </p:cNvPr>
@@ -5153,8 +5205,8 @@
         </p:blipFill>
         <p:spPr>
           <a:xfrm>
-            <a:off x="2941596" y="1807893"/>
-            <a:ext cx="6308808" cy="3242214"/>
+            <a:off x="2319032" y="1702571"/>
+            <a:ext cx="6654800" cy="4216400"/>
           </a:xfrm>
           <a:prstGeom prst="rect">
             <a:avLst/>
@@ -5268,7 +5320,7 @@
                 <a:effectLst/>
                 <a:latin typeface="Helvetica Neue" panose="02000503000000020004" pitchFamily="2" charset="0"/>
               </a:rPr>
-              <a:t>Are any hosts fully booked for March 2025 and which hosts have the least number of available dates in March 2025?</a:t>
+              <a:t>Are any hosts fully booked for March 2025 and which hosts are the busiest in March 2025?</a:t>
             </a:r>
           </a:p>
           <a:p>
@@ -5285,7 +5337,7 @@
                 <a:effectLst/>
                 <a:latin typeface="Helvetica Neue" panose="02000503000000020004" pitchFamily="2" charset="0"/>
               </a:rPr>
-              <a:t>Which hosts have the most reviews which say their listing is dirty?</a:t>
+              <a:t>Identify some hosts which may benefit from a new cleaning service provider? Which hosts have the most reviews which say their listing is dirty?</a:t>
             </a:r>
           </a:p>
           <a:p>
@@ -6744,10 +6796,10 @@
       </p:sp>
       <p:pic>
         <p:nvPicPr>
-          <p:cNvPr id="9" name="Picture 8" descr="A screen shot of a computer code&#10;&#10;Description automatically generated">
-            <a:extLst>
-              <a:ext uri="{FF2B5EF4-FFF2-40B4-BE49-F238E27FC236}">
-                <a16:creationId xmlns:a16="http://schemas.microsoft.com/office/drawing/2014/main" id="{8EB26CA8-ED3E-2950-B606-D673EECCFF6C}"/>
+          <p:cNvPr id="4" name="Picture 3" descr="A screen shot of a computer code&#10;&#10;Description automatically generated">
+            <a:extLst>
+              <a:ext uri="{FF2B5EF4-FFF2-40B4-BE49-F238E27FC236}">
+                <a16:creationId xmlns:a16="http://schemas.microsoft.com/office/drawing/2014/main" id="{CF3E37EB-26CE-E9B0-330C-3FD4B785A045}"/>
               </a:ext>
             </a:extLst>
           </p:cNvPr>
@@ -6764,8 +6816,8 @@
         </p:blipFill>
         <p:spPr>
           <a:xfrm>
-            <a:off x="2347940" y="1808217"/>
-            <a:ext cx="7496119" cy="3241565"/>
+            <a:off x="2089275" y="1928621"/>
+            <a:ext cx="8013449" cy="3587611"/>
           </a:xfrm>
           <a:prstGeom prst="rect">
             <a:avLst/>
